--- a/classes/parte-9-forense-digital-y-respuesta-a-incidentes/207-forense-de-memoria-ram-con-volatility/clase-207-presentacion.pptx
+++ b/classes/parte-9-forense-digital-y-respuesta-a-incidentes/207-forense-de-memoria-ram-con-volatility/clase-207-presentacion.pptx
@@ -17,6 +17,11 @@
     <p:sldId id="265" r:id="rId16"/>
     <p:sldId id="266" r:id="rId17"/>
     <p:sldId id="267" r:id="rId18"/>
+    <p:sldId id="268" r:id="rId19"/>
+    <p:sldId id="269" r:id="rId20"/>
+    <p:sldId id="270" r:id="rId21"/>
+    <p:sldId id="271" r:id="rId22"/>
+    <p:sldId id="272" r:id="rId23"/>
   </p:sldIdLst>
   <p:sldSz cx="9144000" cy="6858000" type="screen4x3"/>
   <p:notesSz cx="6858000" cy="9144000"/>
@@ -3198,7 +3203,7 @@
                   <a:srgbClr val="0B3D2E"/>
                 </a:solidFill>
               </a:rPr>
-              <a:t>⚠️ Errores comunes</a:t>
+              <a:t>🧰 Herramientas y preparación</a:t>
             </a:r>
           </a:p>
         </p:txBody>
@@ -3236,67 +3241,37 @@
                   <a:srgbClr val="22282E"/>
                 </a:solidFill>
               </a:rPr>
-              <a:t>•  Unsatisfied requirement / símbolos — Volatility no halló símbolos del kernel. Deja que los descargue o provee el ISF correcto.</a:t>
-            </a:r>
-          </a:p>
-          <a:p>
-            <a:pPr>
-              <a:spcAft>
-                <a:spcPts val="600"/>
-              </a:spcAft>
-            </a:pPr>
-            <a:r>
-              <a:rPr sz="1500">
-                <a:solidFill>
-                  <a:srgbClr val="22282E"/>
-                </a:solidFill>
-              </a:rPr>
-              <a:t>•  pslist no ve el malware — Ocultamiento por DKOM. Usa psscan.</a:t>
-            </a:r>
-          </a:p>
-          <a:p>
-            <a:pPr>
-              <a:spcAft>
-                <a:spcPts val="600"/>
-              </a:spcAft>
-            </a:pPr>
-            <a:r>
-              <a:rPr sz="1500">
-                <a:solidFill>
-                  <a:srgbClr val="22282E"/>
-                </a:solidFill>
-              </a:rPr>
-              <a:t>•  Volcado corrupto o truncado — Adquisición interrumpida. Repite con la máquina estable.</a:t>
-            </a:r>
-          </a:p>
-          <a:p>
-            <a:pPr>
-              <a:spcAft>
-                <a:spcPts val="600"/>
-              </a:spcAft>
-            </a:pPr>
-            <a:r>
-              <a:rPr sz="1500">
-                <a:solidFill>
-                  <a:srgbClr val="22282E"/>
-                </a:solidFill>
-              </a:rPr>
-              <a:t>•  Plugins de Vol 2 no funcionan — Sintaxis distinta en Vol 3. Usa windows.&lt;plugin&gt;.</a:t>
-            </a:r>
-          </a:p>
-          <a:p>
-            <a:pPr>
-              <a:spcAft>
-                <a:spcPts val="600"/>
-              </a:spcAft>
-            </a:pPr>
-            <a:r>
-              <a:rPr sz="1500">
-                <a:solidFill>
-                  <a:srgbClr val="22282E"/>
-                </a:solidFill>
-              </a:rPr>
-              <a:t>•  netscan vacío — Volcado de un SO no soportado o muy antiguo. Verifica la versión.</a:t>
+              <a:t>•  Adquisición: FTK Imager o WinPmem (Windows), AVML o LiME (Linux).</a:t>
+            </a:r>
+          </a:p>
+          <a:p>
+            <a:pPr>
+              <a:spcAft>
+                <a:spcPts val="600"/>
+              </a:spcAft>
+            </a:pPr>
+            <a:r>
+              <a:rPr sz="1500">
+                <a:solidFill>
+                  <a:srgbClr val="22282E"/>
+                </a:solidFill>
+              </a:rPr>
+              <a:t>•  Análisis: Volatility 3 (Python 3). Instala con pip install volatility3.</a:t>
+            </a:r>
+          </a:p>
+          <a:p>
+            <a:pPr>
+              <a:spcAft>
+                <a:spcPts val="600"/>
+              </a:spcAft>
+            </a:pPr>
+            <a:r>
+              <a:rPr sz="1500">
+                <a:solidFill>
+                  <a:srgbClr val="22282E"/>
+                </a:solidFill>
+              </a:rPr>
+              <a:t>•  Muestras: usa un volcado de una VM propia o los volcados de práctica públicos (por ejemplo, imágenes de entrenamiento de Volatility). Nunca ejecutes malware fuera de un laboratorio aislado y…</a:t>
             </a:r>
           </a:p>
         </p:txBody>
@@ -3347,7 +3322,7 @@
                   <a:srgbClr val="0B3D2E"/>
                 </a:solidFill>
               </a:rPr>
-              <a:t>❓ Preguntas frecuentes</a:t>
+              <a:t>🧪 Laboratorio guiado</a:t>
             </a:r>
           </a:p>
         </p:txBody>
@@ -3385,97 +3360,97 @@
                   <a:srgbClr val="22282E"/>
                 </a:solidFill>
               </a:rPr>
-              <a:t>•  ❓ ¿Volatility 2 o 3?</a:t>
-            </a:r>
-          </a:p>
-          <a:p>
-            <a:pPr>
-              <a:spcAft>
-                <a:spcPts val="600"/>
-              </a:spcAft>
-            </a:pPr>
-            <a:r>
-              <a:rPr sz="1500">
-                <a:solidFill>
-                  <a:srgbClr val="22282E"/>
-                </a:solidFill>
-              </a:rPr>
-              <a:t>•  3 es el estándar actual, en Python 3 y con descarga automática de símbolos. 2 sigue vivo por compatibilidad con plugins antiguos.</a:t>
-            </a:r>
-          </a:p>
-          <a:p>
-            <a:pPr>
-              <a:spcAft>
-                <a:spcPts val="600"/>
-              </a:spcAft>
-            </a:pPr>
-            <a:r>
-              <a:rPr sz="1500">
-                <a:solidFill>
-                  <a:srgbClr val="22282E"/>
-                </a:solidFill>
-              </a:rPr>
-              <a:t>•  ❓ ¿Cómo detecto malware fileless?</a:t>
-            </a:r>
-          </a:p>
-          <a:p>
-            <a:pPr>
-              <a:spcAft>
-                <a:spcPts val="600"/>
-              </a:spcAft>
-            </a:pPr>
-            <a:r>
-              <a:rPr sz="1500">
-                <a:solidFill>
-                  <a:srgbClr val="22282E"/>
-                </a:solidFill>
-              </a:rPr>
-              <a:t>•  En memoria: procesos sin archivo en disco, inyección RWX (malfind), y PowerShell/WMI en cmdline. El disco no lo mostraría.</a:t>
-            </a:r>
-          </a:p>
-          <a:p>
-            <a:pPr>
-              <a:spcAft>
-                <a:spcPts val="600"/>
-              </a:spcAft>
-            </a:pPr>
-            <a:r>
-              <a:rPr sz="1500">
-                <a:solidFill>
-                  <a:srgbClr val="22282E"/>
-                </a:solidFill>
-              </a:rPr>
-              <a:t>•  ❓ ¿Puedo sacar contraseñas de la RAM?</a:t>
-            </a:r>
-          </a:p>
-          <a:p>
-            <a:pPr>
-              <a:spcAft>
-                <a:spcPts val="600"/>
-              </a:spcAft>
-            </a:pPr>
-            <a:r>
-              <a:rPr sz="1500">
-                <a:solidFill>
-                  <a:srgbClr val="22282E"/>
-                </a:solidFill>
-              </a:rPr>
-              <a:t>•  A veces sí (hashes, tokens, incluso texto plano). Trátalas como datos sensibles y protégelas.</a:t>
-            </a:r>
-          </a:p>
-          <a:p>
-            <a:pPr>
-              <a:spcAft>
-                <a:spcPts val="600"/>
-              </a:spcAft>
-            </a:pPr>
-            <a:r>
-              <a:rPr sz="1500">
-                <a:solidFill>
-                  <a:srgbClr val="22282E"/>
-                </a:solidFill>
-              </a:rPr>
-              <a:t>•  ❓ ¿Por qué pslist y psscan difieren?</a:t>
+              <a:t>•  Adquiere la memoria (Windows, WinPmem):</a:t>
+            </a:r>
+          </a:p>
+          <a:p>
+            <a:pPr>
+              <a:spcAft>
+                <a:spcPts val="600"/>
+              </a:spcAft>
+            </a:pPr>
+            <a:r>
+              <a:rPr sz="1500">
+                <a:solidFill>
+                  <a:srgbClr val="22282E"/>
+                </a:solidFill>
+              </a:rPr>
+              <a:t>•  En Linux con AVML:</a:t>
+            </a:r>
+          </a:p>
+          <a:p>
+            <a:pPr>
+              <a:spcAft>
+                <a:spcPts val="600"/>
+              </a:spcAft>
+            </a:pPr>
+            <a:r>
+              <a:rPr sz="1500">
+                <a:solidFill>
+                  <a:srgbClr val="22282E"/>
+                </a:solidFill>
+              </a:rPr>
+              <a:t>•  Lista procesos:</a:t>
+            </a:r>
+          </a:p>
+          <a:p>
+            <a:pPr>
+              <a:spcAft>
+                <a:spcPts val="600"/>
+              </a:spcAft>
+            </a:pPr>
+            <a:r>
+              <a:rPr sz="1500">
+                <a:solidFill>
+                  <a:srgbClr val="22282E"/>
+                </a:solidFill>
+              </a:rPr>
+              <a:t>•  Busca procesos ocultos comparando con psscan:</a:t>
+            </a:r>
+          </a:p>
+          <a:p>
+            <a:pPr>
+              <a:spcAft>
+                <a:spcPts val="600"/>
+              </a:spcAft>
+            </a:pPr>
+            <a:r>
+              <a:rPr sz="1500">
+                <a:solidFill>
+                  <a:srgbClr val="22282E"/>
+                </a:solidFill>
+              </a:rPr>
+              <a:t>•  Cualquier PID en psscan que no esté en pslist es sospechoso.</a:t>
+            </a:r>
+          </a:p>
+          <a:p>
+            <a:pPr>
+              <a:spcAft>
+                <a:spcPts val="600"/>
+              </a:spcAft>
+            </a:pPr>
+            <a:r>
+              <a:rPr sz="1500">
+                <a:solidFill>
+                  <a:srgbClr val="22282E"/>
+                </a:solidFill>
+              </a:rPr>
+              <a:t>•  Revisa el árbol de procesos para relaciones padre-hijo raras:</a:t>
+            </a:r>
+          </a:p>
+          <a:p>
+            <a:pPr>
+              <a:spcAft>
+                <a:spcPts val="600"/>
+              </a:spcAft>
+            </a:pPr>
+            <a:r>
+              <a:rPr sz="1500">
+                <a:solidFill>
+                  <a:srgbClr val="22282E"/>
+                </a:solidFill>
+              </a:rPr>
+              <a:t>•  Enumera conexiones de red:</a:t>
             </a:r>
           </a:p>
         </p:txBody>
@@ -3526,7 +3501,7 @@
                   <a:srgbClr val="0B3D2E"/>
                 </a:solidFill>
               </a:rPr>
-              <a:t>🔗 Referencias</a:t>
+              <a:t>✍️ Ejercicios</a:t>
             </a:r>
           </a:p>
         </p:txBody>
@@ -3564,56 +3539,757 @@
                   <a:srgbClr val="22282E"/>
                 </a:solidFill>
               </a:rPr>
-              <a:t>•  Ligh, Case, Levy, Walters — The Art of Memory Forensics, Wiley 2014.</a:t>
-            </a:r>
-          </a:p>
-          <a:p>
-            <a:pPr>
-              <a:spcAft>
-                <a:spcPts val="600"/>
-              </a:spcAft>
-            </a:pPr>
-            <a:r>
-              <a:rPr sz="1500">
-                <a:solidFill>
-                  <a:srgbClr val="22282E"/>
-                </a:solidFill>
-              </a:rPr>
-              <a:t>•  Volatility Foundation: &lt;https://www.volatilityfoundation.org/&gt;</a:t>
-            </a:r>
-          </a:p>
-          <a:p>
-            <a:pPr>
-              <a:spcAft>
-                <a:spcPts val="600"/>
-              </a:spcAft>
-            </a:pPr>
-            <a:r>
-              <a:rPr sz="1500">
-                <a:solidFill>
-                  <a:srgbClr val="22282E"/>
-                </a:solidFill>
-              </a:rPr>
-              <a:t>•  Volatility 3 docs: &lt;https://volatility3.readthedocs.io/&gt;</a:t>
-            </a:r>
-          </a:p>
-          <a:p>
-            <a:pPr>
-              <a:spcAft>
-                <a:spcPts val="600"/>
-              </a:spcAft>
-            </a:pPr>
-            <a:r>
-              <a:rPr sz="1500">
-                <a:solidFill>
-                  <a:srgbClr val="22282E"/>
-                </a:solidFill>
-              </a:rPr>
-              <a:t>•  WinPmem / AVML: &lt;https://github.com/Velocidex/WinPmem&gt; · &lt;https://github.com/microsoft/avml&gt;</a:t>
-            </a:r>
-          </a:p>
-        </p:txBody>
-      </p:sp>
+              <a:t>•  Explica por qué se adquiere RAM antes que disco.</a:t>
+            </a:r>
+          </a:p>
+          <a:p>
+            <a:pPr>
+              <a:spcAft>
+                <a:spcPts val="600"/>
+              </a:spcAft>
+            </a:pPr>
+            <a:r>
+              <a:rPr sz="1500">
+                <a:solidFill>
+                  <a:srgbClr val="22282E"/>
+                </a:solidFill>
+              </a:rPr>
+              <a:t>•  Detecta un proceso oculto comparando pslist y psscan.</a:t>
+            </a:r>
+          </a:p>
+          <a:p>
+            <a:pPr>
+              <a:spcAft>
+                <a:spcPts val="600"/>
+              </a:spcAft>
+            </a:pPr>
+            <a:r>
+              <a:rPr sz="1500">
+                <a:solidFill>
+                  <a:srgbClr val="22282E"/>
+                </a:solidFill>
+              </a:rPr>
+              <a:t>•  Identifica una conexión de red sospechosa con netscan.</a:t>
+            </a:r>
+          </a:p>
+          <a:p>
+            <a:pPr>
+              <a:spcAft>
+                <a:spcPts val="600"/>
+              </a:spcAft>
+            </a:pPr>
+            <a:r>
+              <a:rPr sz="1500">
+                <a:solidFill>
+                  <a:srgbClr val="22282E"/>
+                </a:solidFill>
+              </a:rPr>
+              <a:t>•  Usa malfind para hallar una región RWX inyectada.</a:t>
+            </a:r>
+          </a:p>
+          <a:p>
+            <a:pPr>
+              <a:spcAft>
+                <a:spcPts val="600"/>
+              </a:spcAft>
+            </a:pPr>
+            <a:r>
+              <a:rPr sz="1500">
+                <a:solidFill>
+                  <a:srgbClr val="22282E"/>
+                </a:solidFill>
+              </a:rPr>
+              <a:t>•  Extrae el ejecutable de un proceso malicioso de la memoria.</a:t>
+            </a:r>
+          </a:p>
+          <a:p>
+            <a:pPr>
+              <a:spcAft>
+                <a:spcPts val="600"/>
+              </a:spcAft>
+            </a:pPr>
+            <a:r>
+              <a:rPr sz="1500">
+                <a:solidFill>
+                  <a:srgbClr val="22282E"/>
+                </a:solidFill>
+              </a:rPr>
+              <a:t>•  Reconstruye la línea de comandos de un proceso con cmdline.</a:t>
+            </a:r>
+          </a:p>
+        </p:txBody>
+      </p:sp>
+    </p:spTree>
+  </p:cSld>
+  <p:clrMapOvr>
+    <a:masterClrMapping/>
+  </p:clrMapOvr>
+</p:sld>
+</file>
+
+<file path=ppt/slides/slide13.xml><?xml version="1.0" encoding="utf-8"?>
+<p:sld xmlns:a="http://schemas.openxmlformats.org/drawingml/2006/main" xmlns:p="http://schemas.openxmlformats.org/presentationml/2006/main" xmlns:r="http://schemas.openxmlformats.org/officeDocument/2006/relationships">
+  <p:cSld>
+    <p:spTree>
+      <p:nvGrpSpPr>
+        <p:cNvPr id="1" name=""/>
+        <p:cNvGrpSpPr/>
+        <p:nvPr/>
+      </p:nvGrpSpPr>
+      <p:grpSpPr/>
+      <p:sp>
+        <p:nvSpPr>
+          <p:cNvPr id="2" name="TextBox 1"/>
+          <p:cNvSpPr txBox="1"/>
+          <p:nvPr/>
+        </p:nvSpPr>
+        <p:spPr>
+          <a:xfrm>
+            <a:off x="457200" y="320040"/>
+            <a:ext cx="8229600" cy="822960"/>
+          </a:xfrm>
+          <a:prstGeom prst="rect">
+            <a:avLst/>
+          </a:prstGeom>
+          <a:noFill/>
+        </p:spPr>
+        <p:txBody>
+          <a:bodyPr wrap="square">
+            <a:spAutoFit/>
+          </a:bodyPr>
+          <a:lstStyle/>
+          <a:p>
+            <a:r>
+              <a:rPr sz="2600" b="1">
+                <a:solidFill>
+                  <a:srgbClr val="0B3D2E"/>
+                </a:solidFill>
+              </a:rPr>
+              <a:t>📝 Reto verificable</a:t>
+            </a:r>
+          </a:p>
+        </p:txBody>
+      </p:sp>
+      <p:sp>
+        <p:nvSpPr>
+          <p:cNvPr id="3" name="TextBox 2"/>
+          <p:cNvSpPr txBox="1"/>
+          <p:nvPr/>
+        </p:nvSpPr>
+        <p:spPr>
+          <a:xfrm>
+            <a:off x="457200" y="1280160"/>
+            <a:ext cx="8229600" cy="4937760"/>
+          </a:xfrm>
+          <a:prstGeom prst="rect">
+            <a:avLst/>
+          </a:prstGeom>
+          <a:noFill/>
+        </p:spPr>
+        <p:txBody>
+          <a:bodyPr wrap="square">
+            <a:spAutoFit/>
+          </a:bodyPr>
+          <a:lstStyle/>
+          <a:p>
+            <a:pPr>
+              <a:spcAft>
+                <a:spcPts val="600"/>
+              </a:spcAft>
+            </a:pPr>
+            <a:r>
+              <a:rPr sz="1500">
+                <a:solidFill>
+                  <a:srgbClr val="22282E"/>
+                </a:solidFill>
+              </a:rPr>
+              <a:t>•  A partir de un volcado de memoria (propio o de entrenamiento) que contenga un proceso malicioso inyectado, identifícalo, documenta cómo lo detectaste y extrae su código para análisis.</a:t>
+            </a:r>
+          </a:p>
+          <a:p>
+            <a:pPr>
+              <a:spcAft>
+                <a:spcPts val="600"/>
+              </a:spcAft>
+            </a:pPr>
+            <a:r>
+              <a:rPr sz="1500">
+                <a:solidFill>
+                  <a:srgbClr val="22282E"/>
+                </a:solidFill>
+              </a:rPr>
+              <a:t>•  Criterio de aceptación: entregas (a) el PID y nombre del proceso malicioso, (b) la evidencia de inyección (salida de malfind con región RWX), (c) su conexión de red si la hay, y (d) el binario…</a:t>
+            </a:r>
+          </a:p>
+        </p:txBody>
+      </p:sp>
+    </p:spTree>
+  </p:cSld>
+  <p:clrMapOvr>
+    <a:masterClrMapping/>
+  </p:clrMapOvr>
+</p:sld>
+</file>
+
+<file path=ppt/slides/slide14.xml><?xml version="1.0" encoding="utf-8"?>
+<p:sld xmlns:a="http://schemas.openxmlformats.org/drawingml/2006/main" xmlns:p="http://schemas.openxmlformats.org/presentationml/2006/main" xmlns:r="http://schemas.openxmlformats.org/officeDocument/2006/relationships">
+  <p:cSld>
+    <p:spTree>
+      <p:nvGrpSpPr>
+        <p:cNvPr id="1" name=""/>
+        <p:cNvGrpSpPr/>
+        <p:nvPr/>
+      </p:nvGrpSpPr>
+      <p:grpSpPr/>
+      <p:sp>
+        <p:nvSpPr>
+          <p:cNvPr id="2" name="TextBox 1"/>
+          <p:cNvSpPr txBox="1"/>
+          <p:nvPr/>
+        </p:nvSpPr>
+        <p:spPr>
+          <a:xfrm>
+            <a:off x="457200" y="320040"/>
+            <a:ext cx="8229600" cy="822960"/>
+          </a:xfrm>
+          <a:prstGeom prst="rect">
+            <a:avLst/>
+          </a:prstGeom>
+          <a:noFill/>
+        </p:spPr>
+        <p:txBody>
+          <a:bodyPr wrap="square">
+            <a:spAutoFit/>
+          </a:bodyPr>
+          <a:lstStyle/>
+          <a:p>
+            <a:r>
+              <a:rPr sz="2600" b="1">
+                <a:solidFill>
+                  <a:srgbClr val="0B3D2E"/>
+                </a:solidFill>
+              </a:rPr>
+              <a:t>⚠️ Errores comunes</a:t>
+            </a:r>
+          </a:p>
+        </p:txBody>
+      </p:sp>
+      <p:sp>
+        <p:nvSpPr>
+          <p:cNvPr id="3" name="TextBox 2"/>
+          <p:cNvSpPr txBox="1"/>
+          <p:nvPr/>
+        </p:nvSpPr>
+        <p:spPr>
+          <a:xfrm>
+            <a:off x="457200" y="1280160"/>
+            <a:ext cx="8229600" cy="4937760"/>
+          </a:xfrm>
+          <a:prstGeom prst="rect">
+            <a:avLst/>
+          </a:prstGeom>
+          <a:noFill/>
+        </p:spPr>
+        <p:txBody>
+          <a:bodyPr wrap="square">
+            <a:spAutoFit/>
+          </a:bodyPr>
+          <a:lstStyle/>
+          <a:p>
+            <a:pPr>
+              <a:spcAft>
+                <a:spcPts val="600"/>
+              </a:spcAft>
+            </a:pPr>
+            <a:r>
+              <a:rPr sz="1500">
+                <a:solidFill>
+                  <a:srgbClr val="22282E"/>
+                </a:solidFill>
+              </a:rPr>
+              <a:t>•  Unsatisfied requirement / símbolos — Volatility no halló símbolos del kernel. Deja que los descargue o provee el ISF correcto.</a:t>
+            </a:r>
+          </a:p>
+          <a:p>
+            <a:pPr>
+              <a:spcAft>
+                <a:spcPts val="600"/>
+              </a:spcAft>
+            </a:pPr>
+            <a:r>
+              <a:rPr sz="1500">
+                <a:solidFill>
+                  <a:srgbClr val="22282E"/>
+                </a:solidFill>
+              </a:rPr>
+              <a:t>•  pslist no ve el malware — Ocultamiento por DKOM. Usa psscan.</a:t>
+            </a:r>
+          </a:p>
+          <a:p>
+            <a:pPr>
+              <a:spcAft>
+                <a:spcPts val="600"/>
+              </a:spcAft>
+            </a:pPr>
+            <a:r>
+              <a:rPr sz="1500">
+                <a:solidFill>
+                  <a:srgbClr val="22282E"/>
+                </a:solidFill>
+              </a:rPr>
+              <a:t>•  Volcado corrupto o truncado — Adquisición interrumpida. Repite con la máquina estable.</a:t>
+            </a:r>
+          </a:p>
+          <a:p>
+            <a:pPr>
+              <a:spcAft>
+                <a:spcPts val="600"/>
+              </a:spcAft>
+            </a:pPr>
+            <a:r>
+              <a:rPr sz="1500">
+                <a:solidFill>
+                  <a:srgbClr val="22282E"/>
+                </a:solidFill>
+              </a:rPr>
+              <a:t>•  Plugins de Vol 2 no funcionan — Sintaxis distinta en Vol 3. Usa windows.&lt;plugin&gt;.</a:t>
+            </a:r>
+          </a:p>
+          <a:p>
+            <a:pPr>
+              <a:spcAft>
+                <a:spcPts val="600"/>
+              </a:spcAft>
+            </a:pPr>
+            <a:r>
+              <a:rPr sz="1500">
+                <a:solidFill>
+                  <a:srgbClr val="22282E"/>
+                </a:solidFill>
+              </a:rPr>
+              <a:t>•  netscan vacío — Volcado de un SO no soportado o muy antiguo. Verifica la versión.</a:t>
+            </a:r>
+          </a:p>
+        </p:txBody>
+      </p:sp>
+    </p:spTree>
+  </p:cSld>
+  <p:clrMapOvr>
+    <a:masterClrMapping/>
+  </p:clrMapOvr>
+</p:sld>
+</file>
+
+<file path=ppt/slides/slide15.xml><?xml version="1.0" encoding="utf-8"?>
+<p:sld xmlns:a="http://schemas.openxmlformats.org/drawingml/2006/main" xmlns:p="http://schemas.openxmlformats.org/presentationml/2006/main" xmlns:r="http://schemas.openxmlformats.org/officeDocument/2006/relationships">
+  <p:cSld>
+    <p:spTree>
+      <p:nvGrpSpPr>
+        <p:cNvPr id="1" name=""/>
+        <p:cNvGrpSpPr/>
+        <p:nvPr/>
+      </p:nvGrpSpPr>
+      <p:grpSpPr/>
+      <p:sp>
+        <p:nvSpPr>
+          <p:cNvPr id="2" name="TextBox 1"/>
+          <p:cNvSpPr txBox="1"/>
+          <p:nvPr/>
+        </p:nvSpPr>
+        <p:spPr>
+          <a:xfrm>
+            <a:off x="457200" y="320040"/>
+            <a:ext cx="8229600" cy="822960"/>
+          </a:xfrm>
+          <a:prstGeom prst="rect">
+            <a:avLst/>
+          </a:prstGeom>
+          <a:noFill/>
+        </p:spPr>
+        <p:txBody>
+          <a:bodyPr wrap="square">
+            <a:spAutoFit/>
+          </a:bodyPr>
+          <a:lstStyle/>
+          <a:p>
+            <a:r>
+              <a:rPr sz="2600" b="1">
+                <a:solidFill>
+                  <a:srgbClr val="0B3D2E"/>
+                </a:solidFill>
+              </a:rPr>
+              <a:t>❓ Preguntas frecuentes</a:t>
+            </a:r>
+          </a:p>
+        </p:txBody>
+      </p:sp>
+      <p:sp>
+        <p:nvSpPr>
+          <p:cNvPr id="3" name="TextBox 2"/>
+          <p:cNvSpPr txBox="1"/>
+          <p:nvPr/>
+        </p:nvSpPr>
+        <p:spPr>
+          <a:xfrm>
+            <a:off x="457200" y="1280160"/>
+            <a:ext cx="8229600" cy="4937760"/>
+          </a:xfrm>
+          <a:prstGeom prst="rect">
+            <a:avLst/>
+          </a:prstGeom>
+          <a:noFill/>
+        </p:spPr>
+        <p:txBody>
+          <a:bodyPr wrap="square">
+            <a:spAutoFit/>
+          </a:bodyPr>
+          <a:lstStyle/>
+          <a:p>
+            <a:pPr>
+              <a:spcAft>
+                <a:spcPts val="600"/>
+              </a:spcAft>
+            </a:pPr>
+            <a:r>
+              <a:rPr sz="1500">
+                <a:solidFill>
+                  <a:srgbClr val="22282E"/>
+                </a:solidFill>
+              </a:rPr>
+              <a:t>•  ❓ ¿Volatility 2 o 3?</a:t>
+            </a:r>
+          </a:p>
+          <a:p>
+            <a:pPr>
+              <a:spcAft>
+                <a:spcPts val="600"/>
+              </a:spcAft>
+            </a:pPr>
+            <a:r>
+              <a:rPr sz="1500">
+                <a:solidFill>
+                  <a:srgbClr val="22282E"/>
+                </a:solidFill>
+              </a:rPr>
+              <a:t>•  Volatility 3 es la rama documentada actualmente y usa Python 3. Puede obtener símbolos disponibles para ciertas plataformas, pero el analista debe verificar correspondencia y disponibilidad…</a:t>
+            </a:r>
+          </a:p>
+          <a:p>
+            <a:pPr>
+              <a:spcAft>
+                <a:spcPts val="600"/>
+              </a:spcAft>
+            </a:pPr>
+            <a:r>
+              <a:rPr sz="1500">
+                <a:solidFill>
+                  <a:srgbClr val="22282E"/>
+                </a:solidFill>
+              </a:rPr>
+              <a:t>•  ❓ ¿Cómo detecto malware fileless?</a:t>
+            </a:r>
+          </a:p>
+          <a:p>
+            <a:pPr>
+              <a:spcAft>
+                <a:spcPts val="600"/>
+              </a:spcAft>
+            </a:pPr>
+            <a:r>
+              <a:rPr sz="1500">
+                <a:solidFill>
+                  <a:srgbClr val="22282E"/>
+                </a:solidFill>
+              </a:rPr>
+              <a:t>•  En memoria: procesos sin archivo en disco, inyección RWX (malfind), y PowerShell/WMI en cmdline. El disco no lo mostraría.</a:t>
+            </a:r>
+          </a:p>
+          <a:p>
+            <a:pPr>
+              <a:spcAft>
+                <a:spcPts val="600"/>
+              </a:spcAft>
+            </a:pPr>
+            <a:r>
+              <a:rPr sz="1500">
+                <a:solidFill>
+                  <a:srgbClr val="22282E"/>
+                </a:solidFill>
+              </a:rPr>
+              <a:t>•  ❓ ¿Puedo sacar contraseñas de la RAM?</a:t>
+            </a:r>
+          </a:p>
+          <a:p>
+            <a:pPr>
+              <a:spcAft>
+                <a:spcPts val="600"/>
+              </a:spcAft>
+            </a:pPr>
+            <a:r>
+              <a:rPr sz="1500">
+                <a:solidFill>
+                  <a:srgbClr val="22282E"/>
+                </a:solidFill>
+              </a:rPr>
+              <a:t>•  A veces sí (hashes, tokens, incluso texto plano). Trátalas como datos sensibles y protégelas.</a:t>
+            </a:r>
+          </a:p>
+          <a:p>
+            <a:pPr>
+              <a:spcAft>
+                <a:spcPts val="600"/>
+              </a:spcAft>
+            </a:pPr>
+            <a:r>
+              <a:rPr sz="1500">
+                <a:solidFill>
+                  <a:srgbClr val="22282E"/>
+                </a:solidFill>
+              </a:rPr>
+              <a:t>•  ❓ ¿Por qué pslist y psscan difieren?</a:t>
+            </a:r>
+          </a:p>
+        </p:txBody>
+      </p:sp>
+    </p:spTree>
+  </p:cSld>
+  <p:clrMapOvr>
+    <a:masterClrMapping/>
+  </p:clrMapOvr>
+</p:sld>
+</file>
+
+<file path=ppt/slides/slide16.xml><?xml version="1.0" encoding="utf-8"?>
+<p:sld xmlns:a="http://schemas.openxmlformats.org/drawingml/2006/main" xmlns:p="http://schemas.openxmlformats.org/presentationml/2006/main" xmlns:r="http://schemas.openxmlformats.org/officeDocument/2006/relationships">
+  <p:cSld>
+    <p:spTree>
+      <p:nvGrpSpPr>
+        <p:cNvPr id="1" name=""/>
+        <p:cNvGrpSpPr/>
+        <p:nvPr/>
+      </p:nvGrpSpPr>
+      <p:grpSpPr/>
+      <p:sp>
+        <p:nvSpPr>
+          <p:cNvPr id="2" name="TextBox 1"/>
+          <p:cNvSpPr txBox="1"/>
+          <p:nvPr/>
+        </p:nvSpPr>
+        <p:spPr>
+          <a:xfrm>
+            <a:off x="457200" y="320040"/>
+            <a:ext cx="8229600" cy="822960"/>
+          </a:xfrm>
+          <a:prstGeom prst="rect">
+            <a:avLst/>
+          </a:prstGeom>
+          <a:noFill/>
+        </p:spPr>
+        <p:txBody>
+          <a:bodyPr wrap="square">
+            <a:spAutoFit/>
+          </a:bodyPr>
+          <a:lstStyle/>
+          <a:p>
+            <a:r>
+              <a:rPr sz="2600" b="1">
+                <a:solidFill>
+                  <a:srgbClr val="0B3D2E"/>
+                </a:solidFill>
+              </a:rPr>
+              <a:t>🔗 Referencias verificables y alcance</a:t>
+            </a:r>
+          </a:p>
+        </p:txBody>
+      </p:sp>
+      <p:sp>
+        <p:nvSpPr>
+          <p:cNvPr id="3" name="TextBox 2"/>
+          <p:cNvSpPr txBox="1"/>
+          <p:nvPr/>
+        </p:nvSpPr>
+        <p:spPr>
+          <a:xfrm>
+            <a:off x="457200" y="1280160"/>
+            <a:ext cx="8229600" cy="4937760"/>
+          </a:xfrm>
+          <a:prstGeom prst="rect">
+            <a:avLst/>
+          </a:prstGeom>
+          <a:noFill/>
+        </p:spPr>
+        <p:txBody>
+          <a:bodyPr wrap="square">
+            <a:spAutoFit/>
+          </a:bodyPr>
+          <a:lstStyle/>
+          <a:p>
+            <a:pPr>
+              <a:spcAft>
+                <a:spcPts val="600"/>
+              </a:spcAft>
+            </a:pPr>
+            <a:r>
+              <a:rPr sz="1500">
+                <a:solidFill>
+                  <a:srgbClr val="22282E"/>
+                </a:solidFill>
+              </a:rPr>
+              <a:t>•  Volatility 3, tutorial de Windows: documentación oficial de adquisición externa, símbolos y ejecución de plugins — &lt;https://volatility3.readthedocs.io/en/latest/getting-started-windows-tutorial.html&gt;</a:t>
+            </a:r>
+          </a:p>
+          <a:p>
+            <a:pPr>
+              <a:spcAft>
+                <a:spcPts val="600"/>
+              </a:spcAft>
+            </a:pPr>
+            <a:r>
+              <a:rPr sz="1500">
+                <a:solidFill>
+                  <a:srgbClr val="22282E"/>
+                </a:solidFill>
+              </a:rPr>
+              <a:t>•  Volatility 3, fundamentos: documentación oficial de capas, objetos, tablas de símbolos y plugins — &lt;https://volatility3.readthedocs.io/en/latest/basics.html&gt;</a:t>
+            </a:r>
+          </a:p>
+          <a:p>
+            <a:pPr>
+              <a:spcAft>
+                <a:spcPts val="600"/>
+              </a:spcAft>
+            </a:pPr>
+            <a:r>
+              <a:rPr sz="1500">
+                <a:solidFill>
+                  <a:srgbClr val="22282E"/>
+                </a:solidFill>
+              </a:rPr>
+              <a:t>•  Volatility Foundation: contexto institucional de los proyectos mantenidos; para comandos y compatibilidad se usa la documentación versionada de Volatility 3 — &lt;https://volatilityfoundation.org/&gt;</a:t>
+            </a:r>
+          </a:p>
+          <a:p>
+            <a:pPr>
+              <a:spcAft>
+                <a:spcPts val="600"/>
+              </a:spcAft>
+            </a:pPr>
+            <a:r>
+              <a:rPr sz="1500">
+                <a:solidFill>
+                  <a:srgbClr val="22282E"/>
+                </a:solidFill>
+              </a:rPr>
+              <a:t>•  WinPmem y AVML: repositorios primarios de adquisidores usados como ejemplos; cada versión y sistema debe probarse por separado — &lt;https://github.com/Velocidex/WinPmem&gt; ·…</a:t>
+            </a:r>
+          </a:p>
+          <a:p>
+            <a:pPr>
+              <a:spcAft>
+                <a:spcPts val="600"/>
+              </a:spcAft>
+            </a:pPr>
+            <a:r>
+              <a:rPr sz="1500">
+                <a:solidFill>
+                  <a:srgbClr val="22282E"/>
+                </a:solidFill>
+              </a:rPr>
+              <a:t>•  NIST SP 800-86 y RFC 3227: fuentes primarias para priorizar datos volátiles y documentar adquisición — &lt;https://doi.org/10.6028/NIST.SP.800-86&gt; · &lt;https://www.rfc-editor.org/info/rfc3227/&gt;</a:t>
+            </a:r>
+          </a:p>
+          <a:p>
+            <a:pPr>
+              <a:spcAft>
+                <a:spcPts val="600"/>
+              </a:spcAft>
+            </a:pPr>
+            <a:r>
+              <a:rPr sz="1500">
+                <a:solidFill>
+                  <a:srgbClr val="22282E"/>
+                </a:solidFill>
+              </a:rPr>
+              <a:t>•  Ligh, Case, Levy y Walters. The Art of Memory Forensics. Wiley: bibliografía complementaria; los comandos se contrastan con Volatility 3 actual.</a:t>
+            </a:r>
+          </a:p>
+        </p:txBody>
+      </p:sp>
+    </p:spTree>
+  </p:cSld>
+  <p:clrMapOvr>
+    <a:masterClrMapping/>
+  </p:clrMapOvr>
+</p:sld>
+</file>
+
+<file path=ppt/slides/slide17.xml><?xml version="1.0" encoding="utf-8"?>
+<p:sld xmlns:a="http://schemas.openxmlformats.org/drawingml/2006/main" xmlns:p="http://schemas.openxmlformats.org/presentationml/2006/main" xmlns:r="http://schemas.openxmlformats.org/officeDocument/2006/relationships">
+  <p:cSld>
+    <p:spTree>
+      <p:nvGrpSpPr>
+        <p:cNvPr id="1" name=""/>
+        <p:cNvGrpSpPr/>
+        <p:nvPr/>
+      </p:nvGrpSpPr>
+      <p:grpSpPr/>
+      <p:sp>
+        <p:nvSpPr>
+          <p:cNvPr id="2" name="TextBox 1"/>
+          <p:cNvSpPr txBox="1"/>
+          <p:nvPr/>
+        </p:nvSpPr>
+        <p:spPr>
+          <a:xfrm>
+            <a:off x="457200" y="274320"/>
+            <a:ext cx="8229600" cy="640080"/>
+          </a:xfrm>
+          <a:prstGeom prst="rect">
+            <a:avLst/>
+          </a:prstGeom>
+          <a:noFill/>
+        </p:spPr>
+        <p:txBody>
+          <a:bodyPr wrap="square">
+            <a:spAutoFit/>
+          </a:bodyPr>
+          <a:lstStyle/>
+          <a:p>
+            <a:r>
+              <a:rPr sz="2200" b="1">
+                <a:solidFill>
+                  <a:srgbClr val="0B3D2E"/>
+                </a:solidFill>
+              </a:rPr>
+              <a:t>Diagrama de la clase</a:t>
+            </a:r>
+          </a:p>
+        </p:txBody>
+      </p:sp>
+      <p:pic>
+        <p:nvPicPr>
+          <p:cNvPr id="3" name="Picture 2" descr="74998620637ac167.png"/>
+          <p:cNvPicPr>
+            <a:picLocks noChangeAspect="1"/>
+          </p:cNvPicPr>
+          <p:nvPr/>
+        </p:nvPicPr>
+        <p:blipFill>
+          <a:blip r:embed="rId2"/>
+          <a:stretch>
+            <a:fillRect/>
+          </a:stretch>
+        </p:blipFill>
+        <p:spPr>
+          <a:xfrm>
+            <a:off x="457200" y="3273552"/>
+            <a:ext cx="8229600" cy="950976"/>
+          </a:xfrm>
+          <a:prstGeom prst="rect">
+            <a:avLst/>
+          </a:prstGeom>
+        </p:spPr>
+      </p:pic>
     </p:spTree>
   </p:cSld>
   <p:clrMapOvr>
@@ -3698,7 +4374,7 @@
                   <a:srgbClr val="22282E"/>
                 </a:solidFill>
               </a:rPr>
-              <a:t>•  Aprender a adquirir y analizar volcados de memoria RAM con Volatility 3 para descubrir lo que el disco no revela: procesos ocultos, conexiones de red activas, inyección de código, malware sin archivo y credenciales en memoria. Al terminar podrás cazar amenazas que solo viven en RAM.</a:t>
+              <a:t>•  Aprender a adquirir y analizar volcados de memoria RAM con Volatility 3 para descubrir lo que el disco no revela: procesos ocultos, conexiones de red activas, inyección de código, malware sin archivo…</a:t>
             </a:r>
           </a:p>
         </p:txBody>
@@ -4092,7 +4768,7 @@
                   <a:srgbClr val="0B3D2E"/>
                 </a:solidFill>
               </a:rPr>
-              <a:t>📖 Definiciones y características</a:t>
+              <a:t>🧠 Explicación en profundidad</a:t>
             </a:r>
           </a:p>
         </p:txBody>
@@ -4130,97 +4806,97 @@
                   <a:srgbClr val="22282E"/>
                 </a:solidFill>
               </a:rPr>
-              <a:t>•  Volcado de memoria: copia del contenido de la RAM en un momento dado. Característica: es la evidencia más volátil; se pierde al apagar.</a:t>
-            </a:r>
-          </a:p>
-          <a:p>
-            <a:pPr>
-              <a:spcAft>
-                <a:spcPts val="600"/>
-              </a:spcAft>
-            </a:pPr>
-            <a:r>
-              <a:rPr sz="1500">
-                <a:solidFill>
-                  <a:srgbClr val="22282E"/>
-                </a:solidFill>
-              </a:rPr>
-              <a:t>•  Malware fileless: código que se ejecuta solo en memoria sin tocar disco. Característica: invisible para antivirus basados en archivos.</a:t>
-            </a:r>
-          </a:p>
-          <a:p>
-            <a:pPr>
-              <a:spcAft>
-                <a:spcPts val="600"/>
-              </a:spcAft>
-            </a:pPr>
-            <a:r>
-              <a:rPr sz="1500">
-                <a:solidFill>
-                  <a:srgbClr val="22282E"/>
-                </a:solidFill>
-              </a:rPr>
-              <a:t>•  Inyección de código: introducir código en el espacio de otro proceso. Característica: se detecta por regiones de memoria RWX inesperadas.</a:t>
-            </a:r>
-          </a:p>
-          <a:p>
-            <a:pPr>
-              <a:spcAft>
-                <a:spcPts val="600"/>
-              </a:spcAft>
-            </a:pPr>
-            <a:r>
-              <a:rPr sz="1500">
-                <a:solidFill>
-                  <a:srgbClr val="22282E"/>
-                </a:solidFill>
-              </a:rPr>
-              <a:t>•  DKOM (Direct Kernel Object Manipulation): técnica de rootkit que oculta procesos alterando estructuras del kernel. Característica: pslist no lo ve, psscan sí.</a:t>
-            </a:r>
-          </a:p>
-          <a:p>
-            <a:pPr>
-              <a:spcAft>
-                <a:spcPts val="600"/>
-              </a:spcAft>
-            </a:pPr>
-            <a:r>
-              <a:rPr sz="1500">
-                <a:solidFill>
-                  <a:srgbClr val="22282E"/>
-                </a:solidFill>
-              </a:rPr>
-              <a:t>•  pslist vs psscan: el primero recorre la lista enlazada de procesos; el segundo escanea memoria por firmas. Característica: la discrepancia delata ocultamiento.</a:t>
-            </a:r>
-          </a:p>
-          <a:p>
-            <a:pPr>
-              <a:spcAft>
-                <a:spcPts val="600"/>
-              </a:spcAft>
-            </a:pPr>
-            <a:r>
-              <a:rPr sz="1500">
-                <a:solidFill>
-                  <a:srgbClr val="22282E"/>
-                </a:solidFill>
-              </a:rPr>
-              <a:t>•  malfind: plugin que busca regiones de memoria sospechosas (RWX). Característica: detector clásico de inyección.</a:t>
-            </a:r>
-          </a:p>
-          <a:p>
-            <a:pPr>
-              <a:spcAft>
-                <a:spcPts val="600"/>
-              </a:spcAft>
-            </a:pPr>
-            <a:r>
-              <a:rPr sz="1500">
-                <a:solidFill>
-                  <a:srgbClr val="22282E"/>
-                </a:solidFill>
-              </a:rPr>
-              <a:t>•  Perfil / símbolos: metadatos del kernel para interpretar estructuras. Característica: Volatility 3 los descarga automáticamente.</a:t>
+              <a:t>•  La RAM captura estado vivo: procesos, mapeos, sockets, credenciales o claves potenciales y rastros ya ausentes del disco. También es una instantánea incompleta y cambiante. Adquirirla modifica…</a:t>
+            </a:r>
+          </a:p>
+          <a:p>
+            <a:pPr>
+              <a:spcAft>
+                <a:spcPts val="600"/>
+              </a:spcAft>
+            </a:pPr>
+            <a:r>
+              <a:rPr sz="1500">
+                <a:solidFill>
+                  <a:srgbClr val="22282E"/>
+                </a:solidFill>
+              </a:rPr>
+              <a:t>•  Volatility 3 interpreta estructuras mediante capas y símbolos; un plugin no «encuentra malware», presenta objetos que el analista contextualiza. Diferencias entre listas de procesos pueden revelar…</a:t>
+            </a:r>
+          </a:p>
+          <a:p>
+            <a:pPr>
+              <a:spcAft>
+                <a:spcPts val="600"/>
+              </a:spcAft>
+            </a:pPr>
+            <a:r>
+              <a:rPr sz="1500">
+                <a:solidFill>
+                  <a:srgbClr val="22282E"/>
+                </a:solidFill>
+              </a:rPr>
+              <a:t>•  Volatility no adquiere memoria: analiza un volcado producido por otra herramienta. El agente de adquisición ocupa páginas, crea handles y consume CPU; además, el contenido puede cambiar mientras se…</a:t>
+            </a:r>
+          </a:p>
+          <a:p>
+            <a:pPr>
+              <a:spcAft>
+                <a:spcPts val="600"/>
+              </a:spcAft>
+            </a:pPr>
+            <a:r>
+              <a:rPr sz="1500">
+                <a:solidFill>
+                  <a:srgbClr val="22282E"/>
+                </a:solidFill>
+              </a:rPr>
+              <a:t>•  La prioridad de RAM depende de la pregunta. Puede conservar procesos, sockets, comandos, regiones mapeadas, claves o contenido descifrado que desaparecerán al apagar. También puede contener secretos…</a:t>
+            </a:r>
+          </a:p>
+          <a:p>
+            <a:pPr>
+              <a:spcAft>
+                <a:spcPts val="600"/>
+              </a:spcAft>
+            </a:pPr>
+            <a:r>
+              <a:rPr sz="1500">
+                <a:solidFill>
+                  <a:srgbClr val="22282E"/>
+                </a:solidFill>
+              </a:rPr>
+              <a:t>•  Volatility 3 usa capas para traducir offsets y tablas de símbolos para interpretar estructuras. En Windows puede obtener símbolos desde PDB; en Linux normalmente necesita símbolos correspondientes al…</a:t>
+            </a:r>
+          </a:p>
+          <a:p>
+            <a:pPr>
+              <a:spcAft>
+                <a:spcPts val="600"/>
+              </a:spcAft>
+            </a:pPr>
+            <a:r>
+              <a:rPr sz="1500">
+                <a:solidFill>
+                  <a:srgbClr val="22282E"/>
+                </a:solidFill>
+              </a:rPr>
+              <a:t>•  pslist, pstree y los scanners responden preguntas distintas. La lista activa describe objetos enlazados; un scanner busca patrones en páginas y puede recuperar procesos terminados o falsos…</a:t>
+            </a:r>
+          </a:p>
+          <a:p>
+            <a:pPr>
+              <a:spcAft>
+                <a:spcPts val="600"/>
+              </a:spcAft>
+            </a:pPr>
+            <a:r>
+              <a:rPr sz="1500">
+                <a:solidFill>
+                  <a:srgbClr val="22282E"/>
+                </a:solidFill>
+              </a:rPr>
+              <a:t>•  Una región ejecutable y escribible puede ser sospechosa, pero JIT, empaquetadores y software de seguridad también generan permisos inusuales. malfind y plugins relacionados priorizan regiones; el…</a:t>
             </a:r>
           </a:p>
         </p:txBody>
@@ -4271,7 +4947,7 @@
                   <a:srgbClr val="0B3D2E"/>
                 </a:solidFill>
               </a:rPr>
-              <a:t>🧰 Herramientas y preparación</a:t>
+              <a:t>📔 Glosario</a:t>
             </a:r>
           </a:p>
         </p:txBody>
@@ -4309,37 +4985,97 @@
                   <a:srgbClr val="22282E"/>
                 </a:solidFill>
               </a:rPr>
-              <a:t>•  Adquisición: FTK Imager o WinPmem (Windows), AVML o LiME (Linux).</a:t>
-            </a:r>
-          </a:p>
-          <a:p>
-            <a:pPr>
-              <a:spcAft>
-                <a:spcPts val="600"/>
-              </a:spcAft>
-            </a:pPr>
-            <a:r>
-              <a:rPr sz="1500">
-                <a:solidFill>
-                  <a:srgbClr val="22282E"/>
-                </a:solidFill>
-              </a:rPr>
-              <a:t>•  Análisis: Volatility 3 (Python 3). Instala con pip install volatility3.</a:t>
-            </a:r>
-          </a:p>
-          <a:p>
-            <a:pPr>
-              <a:spcAft>
-                <a:spcPts val="600"/>
-              </a:spcAft>
-            </a:pPr>
-            <a:r>
-              <a:rPr sz="1500">
-                <a:solidFill>
-                  <a:srgbClr val="22282E"/>
-                </a:solidFill>
-              </a:rPr>
-              <a:t>•  Muestras: usa un volcado de una VM propia o los volcados de práctica públicos (por ejemplo, imágenes de entrenamiento de Volatility). Nunca ejecutes malware fuera de un laboratorio aislado y desechable.</a:t>
+              <a:t>•  Memory image: captura de memoria física disponible.</a:t>
+            </a:r>
+          </a:p>
+          <a:p>
+            <a:pPr>
+              <a:spcAft>
+                <a:spcPts val="600"/>
+              </a:spcAft>
+            </a:pPr>
+            <a:r>
+              <a:rPr sz="1500">
+                <a:solidFill>
+                  <a:srgbClr val="22282E"/>
+                </a:solidFill>
+              </a:rPr>
+              <a:t>•  Symbol table: descripción de tipos y estructuras del kernel.</a:t>
+            </a:r>
+          </a:p>
+          <a:p>
+            <a:pPr>
+              <a:spcAft>
+                <a:spcPts val="600"/>
+              </a:spcAft>
+            </a:pPr>
+            <a:r>
+              <a:rPr sz="1500">
+                <a:solidFill>
+                  <a:srgbClr val="22282E"/>
+                </a:solidFill>
+              </a:rPr>
+              <a:t>•  Plugin: análisis específico de estructuras.</a:t>
+            </a:r>
+          </a:p>
+          <a:p>
+            <a:pPr>
+              <a:spcAft>
+                <a:spcPts val="600"/>
+              </a:spcAft>
+            </a:pPr>
+            <a:r>
+              <a:rPr sz="1500">
+                <a:solidFill>
+                  <a:srgbClr val="22282E"/>
+                </a:solidFill>
+              </a:rPr>
+              <a:t>•  VAD: descriptor de rangos virtuales de un proceso Windows.</a:t>
+            </a:r>
+          </a:p>
+          <a:p>
+            <a:pPr>
+              <a:spcAft>
+                <a:spcPts val="600"/>
+              </a:spcAft>
+            </a:pPr>
+            <a:r>
+              <a:rPr sz="1500">
+                <a:solidFill>
+                  <a:srgbClr val="22282E"/>
+                </a:solidFill>
+              </a:rPr>
+              <a:t>•  Handle: referencia de proceso a un objeto.</a:t>
+            </a:r>
+          </a:p>
+          <a:p>
+            <a:pPr>
+              <a:spcAft>
+                <a:spcPts val="600"/>
+              </a:spcAft>
+            </a:pPr>
+            <a:r>
+              <a:rPr sz="1500">
+                <a:solidFill>
+                  <a:srgbClr val="22282E"/>
+                </a:solidFill>
+              </a:rPr>
+              <a:t>•  Inyección: código o datos introducidos en otro proceso.</a:t>
+            </a:r>
+          </a:p>
+          <a:p>
+            <a:pPr>
+              <a:spcAft>
+                <a:spcPts val="600"/>
+              </a:spcAft>
+            </a:pPr>
+            <a:r>
+              <a:rPr sz="1500">
+                <a:solidFill>
+                  <a:srgbClr val="22282E"/>
+                </a:solidFill>
+              </a:rPr>
+              <a:t>•  Pagefile: almacenamiento que puede contener páginas desplazadas.</a:t>
             </a:r>
           </a:p>
         </p:txBody>
@@ -4390,7 +5126,7 @@
                   <a:srgbClr val="0B3D2E"/>
                 </a:solidFill>
               </a:rPr>
-              <a:t>🧪 Laboratorio guiado</a:t>
+              <a:t>📖 Definiciones y características</a:t>
             </a:r>
           </a:p>
         </p:txBody>
@@ -4428,97 +5164,97 @@
                   <a:srgbClr val="22282E"/>
                 </a:solidFill>
               </a:rPr>
-              <a:t>•  Adquiere la memoria (Windows, WinPmem):</a:t>
-            </a:r>
-          </a:p>
-          <a:p>
-            <a:pPr>
-              <a:spcAft>
-                <a:spcPts val="600"/>
-              </a:spcAft>
-            </a:pPr>
-            <a:r>
-              <a:rPr sz="1500">
-                <a:solidFill>
-                  <a:srgbClr val="22282E"/>
-                </a:solidFill>
-              </a:rPr>
-              <a:t>•  winpmemmini.exe memoria.raw</a:t>
-            </a:r>
-          </a:p>
-          <a:p>
-            <a:pPr>
-              <a:spcAft>
-                <a:spcPts val="600"/>
-              </a:spcAft>
-            </a:pPr>
-            <a:r>
-              <a:rPr sz="1500">
-                <a:solidFill>
-                  <a:srgbClr val="22282E"/>
-                </a:solidFill>
-              </a:rPr>
-              <a:t>•  En Linux con AVML:</a:t>
-            </a:r>
-          </a:p>
-          <a:p>
-            <a:pPr>
-              <a:spcAft>
-                <a:spcPts val="600"/>
-              </a:spcAft>
-            </a:pPr>
-            <a:r>
-              <a:rPr sz="1500">
-                <a:solidFill>
-                  <a:srgbClr val="22282E"/>
-                </a:solidFill>
-              </a:rPr>
-              <a:t>•  ./avml memoria.lime</a:t>
-            </a:r>
-          </a:p>
-          <a:p>
-            <a:pPr>
-              <a:spcAft>
-                <a:spcPts val="600"/>
-              </a:spcAft>
-            </a:pPr>
-            <a:r>
-              <a:rPr sz="1500">
-                <a:solidFill>
-                  <a:srgbClr val="22282E"/>
-                </a:solidFill>
-              </a:rPr>
-              <a:t>•  Lista procesos:</a:t>
-            </a:r>
-          </a:p>
-          <a:p>
-            <a:pPr>
-              <a:spcAft>
-                <a:spcPts val="600"/>
-              </a:spcAft>
-            </a:pPr>
-            <a:r>
-              <a:rPr sz="1500">
-                <a:solidFill>
-                  <a:srgbClr val="22282E"/>
-                </a:solidFill>
-              </a:rPr>
-              <a:t>•  vol -f memoria.raw windows.pslist</a:t>
-            </a:r>
-          </a:p>
-          <a:p>
-            <a:pPr>
-              <a:spcAft>
-                <a:spcPts val="600"/>
-              </a:spcAft>
-            </a:pPr>
-            <a:r>
-              <a:rPr sz="1500">
-                <a:solidFill>
-                  <a:srgbClr val="22282E"/>
-                </a:solidFill>
-              </a:rPr>
-              <a:t>•  Busca procesos ocultos comparando con psscan:</a:t>
+              <a:t>•  Volcado de memoria: copia del contenido de la RAM en un momento dado. Característica: es la evidencia más volátil; se pierde al apagar.</a:t>
+            </a:r>
+          </a:p>
+          <a:p>
+            <a:pPr>
+              <a:spcAft>
+                <a:spcPts val="600"/>
+              </a:spcAft>
+            </a:pPr>
+            <a:r>
+              <a:rPr sz="1500">
+                <a:solidFill>
+                  <a:srgbClr val="22282E"/>
+                </a:solidFill>
+              </a:rPr>
+              <a:t>•  Ejecución sin archivo persistente: código cuyo componente relevante puede residir en memoria o abusar de componentes legítimos. Característica: exige telemetría y análisis de estado, aunque suelen…</a:t>
+            </a:r>
+          </a:p>
+          <a:p>
+            <a:pPr>
+              <a:spcAft>
+                <a:spcPts val="600"/>
+              </a:spcAft>
+            </a:pPr>
+            <a:r>
+              <a:rPr sz="1500">
+                <a:solidFill>
+                  <a:srgbClr val="22282E"/>
+                </a:solidFill>
+              </a:rPr>
+              <a:t>•  Inyección de código: ejecución o mapeo de contenido dentro de otro proceso. Característica: permisos, regiones, hilos y contenido deben corroborarse; RWX por sí solo no la prueba.</a:t>
+            </a:r>
+          </a:p>
+          <a:p>
+            <a:pPr>
+              <a:spcAft>
+                <a:spcPts val="600"/>
+              </a:spcAft>
+            </a:pPr>
+            <a:r>
+              <a:rPr sz="1500">
+                <a:solidFill>
+                  <a:srgbClr val="22282E"/>
+                </a:solidFill>
+              </a:rPr>
+              <a:t>•  DKOM: manipulación de objetos del kernel que puede alterar visibilidad. Característica: comparar métodos de enumeración ayuda, pero una discrepancia también puede tener causas residuales o benignas.</a:t>
+            </a:r>
+          </a:p>
+          <a:p>
+            <a:pPr>
+              <a:spcAft>
+                <a:spcPts val="600"/>
+              </a:spcAft>
+            </a:pPr>
+            <a:r>
+              <a:rPr sz="1500">
+                <a:solidFill>
+                  <a:srgbClr val="22282E"/>
+                </a:solidFill>
+              </a:rPr>
+              <a:t>•  Enumeración y scanning: recorridos estructurados y búsquedas de patrones responden preguntas diferentes. Característica: un scanner puede encontrar objetos terminados y falsos candidatos.</a:t>
+            </a:r>
+          </a:p>
+          <a:p>
+            <a:pPr>
+              <a:spcAft>
+                <a:spcPts val="600"/>
+              </a:spcAft>
+            </a:pPr>
+            <a:r>
+              <a:rPr sz="1500">
+                <a:solidFill>
+                  <a:srgbClr val="22282E"/>
+                </a:solidFill>
+              </a:rPr>
+              <a:t>•  malfind: plugin que prioriza regiones según características de memoria. Característica: produce candidatos para análisis, no un veredicto automático.</a:t>
+            </a:r>
+          </a:p>
+          <a:p>
+            <a:pPr>
+              <a:spcAft>
+                <a:spcPts val="600"/>
+              </a:spcAft>
+            </a:pPr>
+            <a:r>
+              <a:rPr sz="1500">
+                <a:solidFill>
+                  <a:srgbClr val="22282E"/>
+                </a:solidFill>
+              </a:rPr>
+              <a:t>•  Símbolos: descripciones necesarias para interpretar estructuras del sistema. Característica: deben corresponder a la versión capturada; su obtención automática no está garantizada para todo sistema.</a:t>
             </a:r>
           </a:p>
         </p:txBody>
@@ -4569,7 +5305,7 @@
                   <a:srgbClr val="0B3D2E"/>
                 </a:solidFill>
               </a:rPr>
-              <a:t>✍️ Ejercicios</a:t>
+              <a:t>🔍 Caso razonado — proceso legítimo con región anómala</a:t>
             </a:r>
           </a:p>
         </p:txBody>
@@ -4607,82 +5343,22 @@
                   <a:srgbClr val="22282E"/>
                 </a:solidFill>
               </a:rPr>
-              <a:t>•  Explica por qué se adquiere RAM antes que disco.</a:t>
-            </a:r>
-          </a:p>
-          <a:p>
-            <a:pPr>
-              <a:spcAft>
-                <a:spcPts val="600"/>
-              </a:spcAft>
-            </a:pPr>
-            <a:r>
-              <a:rPr sz="1500">
-                <a:solidFill>
-                  <a:srgbClr val="22282E"/>
-                </a:solidFill>
-              </a:rPr>
-              <a:t>•  Detecta un proceso oculto comparando pslist y psscan.</a:t>
-            </a:r>
-          </a:p>
-          <a:p>
-            <a:pPr>
-              <a:spcAft>
-                <a:spcPts val="600"/>
-              </a:spcAft>
-            </a:pPr>
-            <a:r>
-              <a:rPr sz="1500">
-                <a:solidFill>
-                  <a:srgbClr val="22282E"/>
-                </a:solidFill>
-              </a:rPr>
-              <a:t>•  Identifica una conexión de red sospechosa con netscan.</a:t>
-            </a:r>
-          </a:p>
-          <a:p>
-            <a:pPr>
-              <a:spcAft>
-                <a:spcPts val="600"/>
-              </a:spcAft>
-            </a:pPr>
-            <a:r>
-              <a:rPr sz="1500">
-                <a:solidFill>
-                  <a:srgbClr val="22282E"/>
-                </a:solidFill>
-              </a:rPr>
-              <a:t>•  Usa malfind para hallar una región RWX inyectada.</a:t>
-            </a:r>
-          </a:p>
-          <a:p>
-            <a:pPr>
-              <a:spcAft>
-                <a:spcPts val="600"/>
-              </a:spcAft>
-            </a:pPr>
-            <a:r>
-              <a:rPr sz="1500">
-                <a:solidFill>
-                  <a:srgbClr val="22282E"/>
-                </a:solidFill>
-              </a:rPr>
-              <a:t>•  Extrae el ejecutable de un proceso malicioso de la memoria.</a:t>
-            </a:r>
-          </a:p>
-          <a:p>
-            <a:pPr>
-              <a:spcAft>
-                <a:spcPts val="600"/>
-              </a:spcAft>
-            </a:pPr>
-            <a:r>
-              <a:rPr sz="1500">
-                <a:solidFill>
-                  <a:srgbClr val="22282E"/>
-                </a:solidFill>
-              </a:rPr>
-              <a:t>•  Reconstruye la línea de comandos de un proceso con cmdline.</a:t>
+              <a:t>•  pstree muestra un proceso firmado iniciado por su padre esperado. malfind señala una región privada ejecutable; un hilo comienza dentro de ella y netscan relaciona el PID con una conexión reciente.…</a:t>
+            </a:r>
+          </a:p>
+          <a:p>
+            <a:pPr>
+              <a:spcAft>
+                <a:spcPts val="600"/>
+              </a:spcAft>
+            </a:pPr>
+            <a:r>
+              <a:rPr sz="1500">
+                <a:solidFill>
+                  <a:srgbClr val="22282E"/>
+                </a:solidFill>
+              </a:rPr>
+              <a:t>•  El analista exporta la región y registra proceso, offset, protección, plugin y hash. El scanner también muestra un proceso terminado: sus tiempos preceden la captura y no se presenta como activo. La…</a:t>
             </a:r>
           </a:p>
         </p:txBody>
@@ -4733,7 +5409,7 @@
                   <a:srgbClr val="0B3D2E"/>
                 </a:solidFill>
               </a:rPr>
-              <a:t>📝 Reto verificable</a:t>
+              <a:t>✅ Criterio de dominio</a:t>
             </a:r>
           </a:p>
         </p:txBody>
@@ -4771,22 +5447,7 @@
                   <a:srgbClr val="22282E"/>
                 </a:solidFill>
               </a:rPr>
-              <a:t>•  A partir de un volcado de memoria (propio o de entrenamiento) que contenga un proceso malicioso inyectado, identifícalo, documenta cómo lo detectaste y extrae su código para análisis.</a:t>
-            </a:r>
-          </a:p>
-          <a:p>
-            <a:pPr>
-              <a:spcAft>
-                <a:spcPts val="600"/>
-              </a:spcAft>
-            </a:pPr>
-            <a:r>
-              <a:rPr sz="1500">
-                <a:solidFill>
-                  <a:srgbClr val="22282E"/>
-                </a:solidFill>
-              </a:rPr>
-              <a:t>•  Criterio de aceptación: entregas (a) el PID y nombre del proceso malicioso, (b) la evidencia de inyección (salida de malfind con región RWX), (c) su conexión de red si la hay, y (d) el binario extraído con dumpfiles.</a:t>
+              <a:t>•  El alumno identifica sistema y símbolos, compara enumeraciones, relaciona proceso–región–hilo–red y conserva procedencia de toda extracción. Ejecutar malfind y etiquetar todas sus filas como malware…</a:t>
             </a:r>
           </a:p>
         </p:txBody>
